--- a/poster/교원업적평가_접수안내_A3.pptx
+++ b/poster/교원업적평가_접수안내_A3.pptx
@@ -1212,7 +1212,7 @@
                 <a:ea typeface="맑은 고딕" pitchFamily="34" charset="-122"/>
                 <a:cs typeface="맑은 고딕" pitchFamily="34" charset="-120"/>
               </a:rPr>
-              <a:t>접수 담당자</a:t>
+              <a:t>산학협력단</a:t>
             </a:r>
             <a:endParaRPr lang="en-US" sz="5000" dirty="0"/>
           </a:p>
@@ -1232,7 +1232,7 @@
                 <a:ea typeface="맑은 고딕" pitchFamily="34" charset="-122"/>
                 <a:cs typeface="맑은 고딕" pitchFamily="34" charset="-120"/>
               </a:rPr>
-              <a:t>이중영, 이어진</a:t>
+              <a:t>본부동 916호</a:t>
             </a:r>
             <a:endParaRPr lang="en-US" sz="5000" dirty="0"/>
           </a:p>
